--- a/public/videos/repositories/job-match-alert/job-match-alert-tech-preview.pptx
+++ b/public/videos/repositories/job-match-alert/job-match-alert-tech-preview.pptx
@@ -134,7 +134,7 @@
           <p:cNvPr id="2" name="タイトル 1">
             <a:extLst>
               <a:ext uri="{FF2B5EF4-FFF2-40B4-BE49-F238E27FC236}">
-                <a16:creationId xmlns:a16="http://schemas.microsoft.com/office/drawing/2014/main" id="{AD680952-EE1F-ECAD-9CD1-B711EA88ADA8}"/>
+                <a16:creationId xmlns:a16="http://schemas.microsoft.com/office/drawing/2014/main" id="{0FD9F071-32F5-7F04-A8BD-0B5E3838407E}"/>
               </a:ext>
             </a:extLst>
           </p:cNvPr>
@@ -171,7 +171,7 @@
           <p:cNvPr id="3" name="字幕 2">
             <a:extLst>
               <a:ext uri="{FF2B5EF4-FFF2-40B4-BE49-F238E27FC236}">
-                <a16:creationId xmlns:a16="http://schemas.microsoft.com/office/drawing/2014/main" id="{EA7F6CF6-6EA2-562C-DCE4-2D1A3328D986}"/>
+                <a16:creationId xmlns:a16="http://schemas.microsoft.com/office/drawing/2014/main" id="{C32355C0-6359-6F95-4344-CAF9FBC49587}"/>
               </a:ext>
             </a:extLst>
           </p:cNvPr>
@@ -241,7 +241,7 @@
           <p:cNvPr id="4" name="日付プレースホルダー 3">
             <a:extLst>
               <a:ext uri="{FF2B5EF4-FFF2-40B4-BE49-F238E27FC236}">
-                <a16:creationId xmlns:a16="http://schemas.microsoft.com/office/drawing/2014/main" id="{BBE21F9B-F517-FD67-41F4-0B28BF46102B}"/>
+                <a16:creationId xmlns:a16="http://schemas.microsoft.com/office/drawing/2014/main" id="{3CE71EC0-014A-69E1-870F-9D635ABF34E8}"/>
               </a:ext>
             </a:extLst>
           </p:cNvPr>
@@ -257,7 +257,7 @@
           <a:bodyPr/>
           <a:lstStyle/>
           <a:p>
-            <a:fld id="{B99048E9-CBCF-4E52-B036-1A4B28DE5D42}" type="datetimeFigureOut">
+            <a:fld id="{9489173B-8EFA-459A-934B-7C9EF1259010}" type="datetimeFigureOut">
               <a:rPr kumimoji="1" lang="ja-JP" altLang="en-US" smtClean="0"/>
               <a:t>2026/7/30</a:t>
             </a:fld>
@@ -270,7 +270,7 @@
           <p:cNvPr id="5" name="フッター プレースホルダー 4">
             <a:extLst>
               <a:ext uri="{FF2B5EF4-FFF2-40B4-BE49-F238E27FC236}">
-                <a16:creationId xmlns:a16="http://schemas.microsoft.com/office/drawing/2014/main" id="{55FA3E69-93EA-CDB3-A683-DDF8AB8154CF}"/>
+                <a16:creationId xmlns:a16="http://schemas.microsoft.com/office/drawing/2014/main" id="{B58436B5-8ECF-E99A-BB7F-F9334C3DB75C}"/>
               </a:ext>
             </a:extLst>
           </p:cNvPr>
@@ -295,7 +295,7 @@
           <p:cNvPr id="6" name="スライド番号プレースホルダー 5">
             <a:extLst>
               <a:ext uri="{FF2B5EF4-FFF2-40B4-BE49-F238E27FC236}">
-                <a16:creationId xmlns:a16="http://schemas.microsoft.com/office/drawing/2014/main" id="{A75ABD9D-C1E5-87B9-D95A-B2B568FDCEE9}"/>
+                <a16:creationId xmlns:a16="http://schemas.microsoft.com/office/drawing/2014/main" id="{5E172502-DB56-695A-BC6A-C5ABB17DB39B}"/>
               </a:ext>
             </a:extLst>
           </p:cNvPr>
@@ -311,7 +311,7 @@
           <a:bodyPr/>
           <a:lstStyle/>
           <a:p>
-            <a:fld id="{B0543E5C-F890-46BD-A667-A456DA8C8562}" type="slidenum">
+            <a:fld id="{7B673B4D-AC4D-46AC-9121-31AA76446341}" type="slidenum">
               <a:rPr kumimoji="1" lang="ja-JP" altLang="en-US" smtClean="0"/>
               <a:t>‹#›</a:t>
             </a:fld>
@@ -322,7 +322,7 @@
     </p:spTree>
     <p:extLst>
       <p:ext uri="{BB962C8B-B14F-4D97-AF65-F5344CB8AC3E}">
-        <p14:creationId xmlns:p14="http://schemas.microsoft.com/office/powerpoint/2010/main" val="328697175"/>
+        <p14:creationId xmlns:p14="http://schemas.microsoft.com/office/powerpoint/2010/main" val="3037978120"/>
       </p:ext>
     </p:extLst>
   </p:cSld>
@@ -354,7 +354,7 @@
           <p:cNvPr id="2" name="タイトル 1">
             <a:extLst>
               <a:ext uri="{FF2B5EF4-FFF2-40B4-BE49-F238E27FC236}">
-                <a16:creationId xmlns:a16="http://schemas.microsoft.com/office/drawing/2014/main" id="{B341A52C-F8B4-3B9E-B546-61FC0BDEE699}"/>
+                <a16:creationId xmlns:a16="http://schemas.microsoft.com/office/drawing/2014/main" id="{06B08483-F585-3CC2-4465-55837935E504}"/>
               </a:ext>
             </a:extLst>
           </p:cNvPr>
@@ -382,7 +382,7 @@
           <p:cNvPr id="3" name="縦書きテキスト プレースホルダー 2">
             <a:extLst>
               <a:ext uri="{FF2B5EF4-FFF2-40B4-BE49-F238E27FC236}">
-                <a16:creationId xmlns:a16="http://schemas.microsoft.com/office/drawing/2014/main" id="{2D79A8BB-1E2B-5831-68B7-DD75DB2D6390}"/>
+                <a16:creationId xmlns:a16="http://schemas.microsoft.com/office/drawing/2014/main" id="{20080EA1-833F-0734-FAE7-CD8D07D10AF5}"/>
               </a:ext>
             </a:extLst>
           </p:cNvPr>
@@ -471,7 +471,7 @@
           <p:cNvPr id="4" name="日付プレースホルダー 3">
             <a:extLst>
               <a:ext uri="{FF2B5EF4-FFF2-40B4-BE49-F238E27FC236}">
-                <a16:creationId xmlns:a16="http://schemas.microsoft.com/office/drawing/2014/main" id="{5BC305E9-BC36-516A-9B74-346C5D019976}"/>
+                <a16:creationId xmlns:a16="http://schemas.microsoft.com/office/drawing/2014/main" id="{76B44ACD-04A6-08B6-E8AD-C7098D8EB198}"/>
               </a:ext>
             </a:extLst>
           </p:cNvPr>
@@ -487,7 +487,7 @@
           <a:bodyPr/>
           <a:lstStyle/>
           <a:p>
-            <a:fld id="{B99048E9-CBCF-4E52-B036-1A4B28DE5D42}" type="datetimeFigureOut">
+            <a:fld id="{9489173B-8EFA-459A-934B-7C9EF1259010}" type="datetimeFigureOut">
               <a:rPr kumimoji="1" lang="ja-JP" altLang="en-US" smtClean="0"/>
               <a:t>2026/7/30</a:t>
             </a:fld>
@@ -500,7 +500,7 @@
           <p:cNvPr id="5" name="フッター プレースホルダー 4">
             <a:extLst>
               <a:ext uri="{FF2B5EF4-FFF2-40B4-BE49-F238E27FC236}">
-                <a16:creationId xmlns:a16="http://schemas.microsoft.com/office/drawing/2014/main" id="{B456EA50-9167-5DAF-F8AE-686DE7B69951}"/>
+                <a16:creationId xmlns:a16="http://schemas.microsoft.com/office/drawing/2014/main" id="{5BF5E711-CEC4-45B4-553F-5E6034E40426}"/>
               </a:ext>
             </a:extLst>
           </p:cNvPr>
@@ -525,7 +525,7 @@
           <p:cNvPr id="6" name="スライド番号プレースホルダー 5">
             <a:extLst>
               <a:ext uri="{FF2B5EF4-FFF2-40B4-BE49-F238E27FC236}">
-                <a16:creationId xmlns:a16="http://schemas.microsoft.com/office/drawing/2014/main" id="{B094E811-4B54-C6D7-8D45-BF289EC84951}"/>
+                <a16:creationId xmlns:a16="http://schemas.microsoft.com/office/drawing/2014/main" id="{3B849F35-AB79-16F6-47FA-274AD1873A84}"/>
               </a:ext>
             </a:extLst>
           </p:cNvPr>
@@ -541,7 +541,7 @@
           <a:bodyPr/>
           <a:lstStyle/>
           <a:p>
-            <a:fld id="{B0543E5C-F890-46BD-A667-A456DA8C8562}" type="slidenum">
+            <a:fld id="{7B673B4D-AC4D-46AC-9121-31AA76446341}" type="slidenum">
               <a:rPr kumimoji="1" lang="ja-JP" altLang="en-US" smtClean="0"/>
               <a:t>‹#›</a:t>
             </a:fld>
@@ -552,7 +552,7 @@
     </p:spTree>
     <p:extLst>
       <p:ext uri="{BB962C8B-B14F-4D97-AF65-F5344CB8AC3E}">
-        <p14:creationId xmlns:p14="http://schemas.microsoft.com/office/powerpoint/2010/main" val="187049528"/>
+        <p14:creationId xmlns:p14="http://schemas.microsoft.com/office/powerpoint/2010/main" val="1181477458"/>
       </p:ext>
     </p:extLst>
   </p:cSld>
@@ -584,7 +584,7 @@
           <p:cNvPr id="2" name="縦書きタイトル 1">
             <a:extLst>
               <a:ext uri="{FF2B5EF4-FFF2-40B4-BE49-F238E27FC236}">
-                <a16:creationId xmlns:a16="http://schemas.microsoft.com/office/drawing/2014/main" id="{1A32E200-A493-A7FB-9A74-02A7B7BEF14B}"/>
+                <a16:creationId xmlns:a16="http://schemas.microsoft.com/office/drawing/2014/main" id="{5E1D6653-9166-9304-FCFA-AF8EDB248028}"/>
               </a:ext>
             </a:extLst>
           </p:cNvPr>
@@ -617,7 +617,7 @@
           <p:cNvPr id="3" name="縦書きテキスト プレースホルダー 2">
             <a:extLst>
               <a:ext uri="{FF2B5EF4-FFF2-40B4-BE49-F238E27FC236}">
-                <a16:creationId xmlns:a16="http://schemas.microsoft.com/office/drawing/2014/main" id="{81ED550B-6B8F-349D-9FD6-FEF2AE656162}"/>
+                <a16:creationId xmlns:a16="http://schemas.microsoft.com/office/drawing/2014/main" id="{4D476D7D-C40A-ED92-73B4-438BD0CAB86E}"/>
               </a:ext>
             </a:extLst>
           </p:cNvPr>
@@ -711,7 +711,7 @@
           <p:cNvPr id="4" name="日付プレースホルダー 3">
             <a:extLst>
               <a:ext uri="{FF2B5EF4-FFF2-40B4-BE49-F238E27FC236}">
-                <a16:creationId xmlns:a16="http://schemas.microsoft.com/office/drawing/2014/main" id="{ECC8000B-7702-F41F-A69B-6779A82A7EAD}"/>
+                <a16:creationId xmlns:a16="http://schemas.microsoft.com/office/drawing/2014/main" id="{F1EA150E-220A-593B-E80A-1188E77FA7CD}"/>
               </a:ext>
             </a:extLst>
           </p:cNvPr>
@@ -727,7 +727,7 @@
           <a:bodyPr/>
           <a:lstStyle/>
           <a:p>
-            <a:fld id="{B99048E9-CBCF-4E52-B036-1A4B28DE5D42}" type="datetimeFigureOut">
+            <a:fld id="{9489173B-8EFA-459A-934B-7C9EF1259010}" type="datetimeFigureOut">
               <a:rPr kumimoji="1" lang="ja-JP" altLang="en-US" smtClean="0"/>
               <a:t>2026/7/30</a:t>
             </a:fld>
@@ -740,7 +740,7 @@
           <p:cNvPr id="5" name="フッター プレースホルダー 4">
             <a:extLst>
               <a:ext uri="{FF2B5EF4-FFF2-40B4-BE49-F238E27FC236}">
-                <a16:creationId xmlns:a16="http://schemas.microsoft.com/office/drawing/2014/main" id="{90019156-F570-D2FA-FBC2-2F8FA2F42378}"/>
+                <a16:creationId xmlns:a16="http://schemas.microsoft.com/office/drawing/2014/main" id="{FBEA4EBF-55AE-F9E1-A3A9-DC8EE4F6A98F}"/>
               </a:ext>
             </a:extLst>
           </p:cNvPr>
@@ -765,7 +765,7 @@
           <p:cNvPr id="6" name="スライド番号プレースホルダー 5">
             <a:extLst>
               <a:ext uri="{FF2B5EF4-FFF2-40B4-BE49-F238E27FC236}">
-                <a16:creationId xmlns:a16="http://schemas.microsoft.com/office/drawing/2014/main" id="{4F1B6724-4F4D-BB61-37C0-4894B0D89828}"/>
+                <a16:creationId xmlns:a16="http://schemas.microsoft.com/office/drawing/2014/main" id="{5E49F21F-60BC-211B-4A8C-54C812894238}"/>
               </a:ext>
             </a:extLst>
           </p:cNvPr>
@@ -781,7 +781,7 @@
           <a:bodyPr/>
           <a:lstStyle/>
           <a:p>
-            <a:fld id="{B0543E5C-F890-46BD-A667-A456DA8C8562}" type="slidenum">
+            <a:fld id="{7B673B4D-AC4D-46AC-9121-31AA76446341}" type="slidenum">
               <a:rPr kumimoji="1" lang="ja-JP" altLang="en-US" smtClean="0"/>
               <a:t>‹#›</a:t>
             </a:fld>
@@ -792,7 +792,7 @@
     </p:spTree>
     <p:extLst>
       <p:ext uri="{BB962C8B-B14F-4D97-AF65-F5344CB8AC3E}">
-        <p14:creationId xmlns:p14="http://schemas.microsoft.com/office/powerpoint/2010/main" val="2172287588"/>
+        <p14:creationId xmlns:p14="http://schemas.microsoft.com/office/powerpoint/2010/main" val="2605517931"/>
       </p:ext>
     </p:extLst>
   </p:cSld>
@@ -824,7 +824,7 @@
           <p:cNvPr id="2" name="タイトル 1">
             <a:extLst>
               <a:ext uri="{FF2B5EF4-FFF2-40B4-BE49-F238E27FC236}">
-                <a16:creationId xmlns:a16="http://schemas.microsoft.com/office/drawing/2014/main" id="{559FEEAD-D2A9-444F-C81B-6A017807F525}"/>
+                <a16:creationId xmlns:a16="http://schemas.microsoft.com/office/drawing/2014/main" id="{EEA28CE8-80E6-C58E-C4F5-71E8E0E5AED9}"/>
               </a:ext>
             </a:extLst>
           </p:cNvPr>
@@ -852,7 +852,7 @@
           <p:cNvPr id="3" name="コンテンツ プレースホルダー 2">
             <a:extLst>
               <a:ext uri="{FF2B5EF4-FFF2-40B4-BE49-F238E27FC236}">
-                <a16:creationId xmlns:a16="http://schemas.microsoft.com/office/drawing/2014/main" id="{DC96DBE6-EBA3-36F7-7768-A05F0ED76608}"/>
+                <a16:creationId xmlns:a16="http://schemas.microsoft.com/office/drawing/2014/main" id="{035213BF-648A-6DB5-E207-BDE6FA433124}"/>
               </a:ext>
             </a:extLst>
           </p:cNvPr>
@@ -941,7 +941,7 @@
           <p:cNvPr id="4" name="日付プレースホルダー 3">
             <a:extLst>
               <a:ext uri="{FF2B5EF4-FFF2-40B4-BE49-F238E27FC236}">
-                <a16:creationId xmlns:a16="http://schemas.microsoft.com/office/drawing/2014/main" id="{7BBDE199-6578-FD30-AA36-66D3D855EF94}"/>
+                <a16:creationId xmlns:a16="http://schemas.microsoft.com/office/drawing/2014/main" id="{006081F5-EBE2-EE2C-CA0D-8FE9ED1B78C5}"/>
               </a:ext>
             </a:extLst>
           </p:cNvPr>
@@ -957,7 +957,7 @@
           <a:bodyPr/>
           <a:lstStyle/>
           <a:p>
-            <a:fld id="{B99048E9-CBCF-4E52-B036-1A4B28DE5D42}" type="datetimeFigureOut">
+            <a:fld id="{9489173B-8EFA-459A-934B-7C9EF1259010}" type="datetimeFigureOut">
               <a:rPr kumimoji="1" lang="ja-JP" altLang="en-US" smtClean="0"/>
               <a:t>2026/7/30</a:t>
             </a:fld>
@@ -970,7 +970,7 @@
           <p:cNvPr id="5" name="フッター プレースホルダー 4">
             <a:extLst>
               <a:ext uri="{FF2B5EF4-FFF2-40B4-BE49-F238E27FC236}">
-                <a16:creationId xmlns:a16="http://schemas.microsoft.com/office/drawing/2014/main" id="{9202AEE1-4C30-540B-1517-0F7BD7D160AC}"/>
+                <a16:creationId xmlns:a16="http://schemas.microsoft.com/office/drawing/2014/main" id="{19A12F69-73A3-3246-C0C7-6D74A4E2B552}"/>
               </a:ext>
             </a:extLst>
           </p:cNvPr>
@@ -995,7 +995,7 @@
           <p:cNvPr id="6" name="スライド番号プレースホルダー 5">
             <a:extLst>
               <a:ext uri="{FF2B5EF4-FFF2-40B4-BE49-F238E27FC236}">
-                <a16:creationId xmlns:a16="http://schemas.microsoft.com/office/drawing/2014/main" id="{F8BB43BA-EC1B-6F10-0209-06A8B6A5E383}"/>
+                <a16:creationId xmlns:a16="http://schemas.microsoft.com/office/drawing/2014/main" id="{6B449D4E-4B72-7A8B-11A7-127EA0285B5D}"/>
               </a:ext>
             </a:extLst>
           </p:cNvPr>
@@ -1011,7 +1011,7 @@
           <a:bodyPr/>
           <a:lstStyle/>
           <a:p>
-            <a:fld id="{B0543E5C-F890-46BD-A667-A456DA8C8562}" type="slidenum">
+            <a:fld id="{7B673B4D-AC4D-46AC-9121-31AA76446341}" type="slidenum">
               <a:rPr kumimoji="1" lang="ja-JP" altLang="en-US" smtClean="0"/>
               <a:t>‹#›</a:t>
             </a:fld>
@@ -1022,7 +1022,7 @@
     </p:spTree>
     <p:extLst>
       <p:ext uri="{BB962C8B-B14F-4D97-AF65-F5344CB8AC3E}">
-        <p14:creationId xmlns:p14="http://schemas.microsoft.com/office/powerpoint/2010/main" val="2158036817"/>
+        <p14:creationId xmlns:p14="http://schemas.microsoft.com/office/powerpoint/2010/main" val="3399034063"/>
       </p:ext>
     </p:extLst>
   </p:cSld>
@@ -1054,7 +1054,7 @@
           <p:cNvPr id="2" name="タイトル 1">
             <a:extLst>
               <a:ext uri="{FF2B5EF4-FFF2-40B4-BE49-F238E27FC236}">
-                <a16:creationId xmlns:a16="http://schemas.microsoft.com/office/drawing/2014/main" id="{8BFA5F31-1AD2-B0AF-7E64-F970F9D03ABE}"/>
+                <a16:creationId xmlns:a16="http://schemas.microsoft.com/office/drawing/2014/main" id="{62F1C9AD-0E20-0CA7-CC7D-9DD96E8B4329}"/>
               </a:ext>
             </a:extLst>
           </p:cNvPr>
@@ -1091,7 +1091,7 @@
           <p:cNvPr id="3" name="テキスト プレースホルダー 2">
             <a:extLst>
               <a:ext uri="{FF2B5EF4-FFF2-40B4-BE49-F238E27FC236}">
-                <a16:creationId xmlns:a16="http://schemas.microsoft.com/office/drawing/2014/main" id="{52B7CE4C-8EEA-A62F-FA14-304172D7681B}"/>
+                <a16:creationId xmlns:a16="http://schemas.microsoft.com/office/drawing/2014/main" id="{7943B4E6-DA94-4CD5-65B1-525D7240E311}"/>
               </a:ext>
             </a:extLst>
           </p:cNvPr>
@@ -1216,7 +1216,7 @@
           <p:cNvPr id="4" name="日付プレースホルダー 3">
             <a:extLst>
               <a:ext uri="{FF2B5EF4-FFF2-40B4-BE49-F238E27FC236}">
-                <a16:creationId xmlns:a16="http://schemas.microsoft.com/office/drawing/2014/main" id="{49E11BE8-5FAD-2288-DF15-D22B4BA7E1A3}"/>
+                <a16:creationId xmlns:a16="http://schemas.microsoft.com/office/drawing/2014/main" id="{16F25A0A-469B-B68F-2733-3031DD985C6A}"/>
               </a:ext>
             </a:extLst>
           </p:cNvPr>
@@ -1232,7 +1232,7 @@
           <a:bodyPr/>
           <a:lstStyle/>
           <a:p>
-            <a:fld id="{B99048E9-CBCF-4E52-B036-1A4B28DE5D42}" type="datetimeFigureOut">
+            <a:fld id="{9489173B-8EFA-459A-934B-7C9EF1259010}" type="datetimeFigureOut">
               <a:rPr kumimoji="1" lang="ja-JP" altLang="en-US" smtClean="0"/>
               <a:t>2026/7/30</a:t>
             </a:fld>
@@ -1245,7 +1245,7 @@
           <p:cNvPr id="5" name="フッター プレースホルダー 4">
             <a:extLst>
               <a:ext uri="{FF2B5EF4-FFF2-40B4-BE49-F238E27FC236}">
-                <a16:creationId xmlns:a16="http://schemas.microsoft.com/office/drawing/2014/main" id="{1E18AB92-9B2E-2425-584C-0DD8541616F6}"/>
+                <a16:creationId xmlns:a16="http://schemas.microsoft.com/office/drawing/2014/main" id="{158B10CC-7A0F-3731-2D1A-A6BA4C961F91}"/>
               </a:ext>
             </a:extLst>
           </p:cNvPr>
@@ -1270,7 +1270,7 @@
           <p:cNvPr id="6" name="スライド番号プレースホルダー 5">
             <a:extLst>
               <a:ext uri="{FF2B5EF4-FFF2-40B4-BE49-F238E27FC236}">
-                <a16:creationId xmlns:a16="http://schemas.microsoft.com/office/drawing/2014/main" id="{CD9A1CB7-A97C-9591-B108-ACB1C29D5BF5}"/>
+                <a16:creationId xmlns:a16="http://schemas.microsoft.com/office/drawing/2014/main" id="{8BBAA4A4-E4AE-440B-AF2E-16E652751C0E}"/>
               </a:ext>
             </a:extLst>
           </p:cNvPr>
@@ -1286,7 +1286,7 @@
           <a:bodyPr/>
           <a:lstStyle/>
           <a:p>
-            <a:fld id="{B0543E5C-F890-46BD-A667-A456DA8C8562}" type="slidenum">
+            <a:fld id="{7B673B4D-AC4D-46AC-9121-31AA76446341}" type="slidenum">
               <a:rPr kumimoji="1" lang="ja-JP" altLang="en-US" smtClean="0"/>
               <a:t>‹#›</a:t>
             </a:fld>
@@ -1297,7 +1297,7 @@
     </p:spTree>
     <p:extLst>
       <p:ext uri="{BB962C8B-B14F-4D97-AF65-F5344CB8AC3E}">
-        <p14:creationId xmlns:p14="http://schemas.microsoft.com/office/powerpoint/2010/main" val="3317342860"/>
+        <p14:creationId xmlns:p14="http://schemas.microsoft.com/office/powerpoint/2010/main" val="2034976061"/>
       </p:ext>
     </p:extLst>
   </p:cSld>
@@ -1329,7 +1329,7 @@
           <p:cNvPr id="2" name="タイトル 1">
             <a:extLst>
               <a:ext uri="{FF2B5EF4-FFF2-40B4-BE49-F238E27FC236}">
-                <a16:creationId xmlns:a16="http://schemas.microsoft.com/office/drawing/2014/main" id="{AD6D7886-C3F9-20DA-13BD-C60C8A2292B0}"/>
+                <a16:creationId xmlns:a16="http://schemas.microsoft.com/office/drawing/2014/main" id="{FB4F6B67-FAC7-5079-A032-CC50D4C9BC97}"/>
               </a:ext>
             </a:extLst>
           </p:cNvPr>
@@ -1357,7 +1357,7 @@
           <p:cNvPr id="3" name="コンテンツ プレースホルダー 2">
             <a:extLst>
               <a:ext uri="{FF2B5EF4-FFF2-40B4-BE49-F238E27FC236}">
-                <a16:creationId xmlns:a16="http://schemas.microsoft.com/office/drawing/2014/main" id="{55233A9A-61AC-805F-D28A-AA4EF864F803}"/>
+                <a16:creationId xmlns:a16="http://schemas.microsoft.com/office/drawing/2014/main" id="{411B55BF-B402-DF7D-7770-278CD32AE420}"/>
               </a:ext>
             </a:extLst>
           </p:cNvPr>
@@ -1451,7 +1451,7 @@
           <p:cNvPr id="4" name="コンテンツ プレースホルダー 3">
             <a:extLst>
               <a:ext uri="{FF2B5EF4-FFF2-40B4-BE49-F238E27FC236}">
-                <a16:creationId xmlns:a16="http://schemas.microsoft.com/office/drawing/2014/main" id="{D97ACEAF-9F62-CBBB-D18A-EBC15051062B}"/>
+                <a16:creationId xmlns:a16="http://schemas.microsoft.com/office/drawing/2014/main" id="{100BDF9C-28FB-5A2C-5C97-86D3B1A70065}"/>
               </a:ext>
             </a:extLst>
           </p:cNvPr>
@@ -1545,7 +1545,7 @@
           <p:cNvPr id="5" name="日付プレースホルダー 4">
             <a:extLst>
               <a:ext uri="{FF2B5EF4-FFF2-40B4-BE49-F238E27FC236}">
-                <a16:creationId xmlns:a16="http://schemas.microsoft.com/office/drawing/2014/main" id="{A58E548E-03C0-7E1B-4D4D-43C3DCCB0C3D}"/>
+                <a16:creationId xmlns:a16="http://schemas.microsoft.com/office/drawing/2014/main" id="{3B065DE5-2992-D8DA-734C-46F92F8A3D1B}"/>
               </a:ext>
             </a:extLst>
           </p:cNvPr>
@@ -1561,7 +1561,7 @@
           <a:bodyPr/>
           <a:lstStyle/>
           <a:p>
-            <a:fld id="{B99048E9-CBCF-4E52-B036-1A4B28DE5D42}" type="datetimeFigureOut">
+            <a:fld id="{9489173B-8EFA-459A-934B-7C9EF1259010}" type="datetimeFigureOut">
               <a:rPr kumimoji="1" lang="ja-JP" altLang="en-US" smtClean="0"/>
               <a:t>2026/7/30</a:t>
             </a:fld>
@@ -1574,7 +1574,7 @@
           <p:cNvPr id="6" name="フッター プレースホルダー 5">
             <a:extLst>
               <a:ext uri="{FF2B5EF4-FFF2-40B4-BE49-F238E27FC236}">
-                <a16:creationId xmlns:a16="http://schemas.microsoft.com/office/drawing/2014/main" id="{275FF39A-0C54-FAC0-24E3-48A92B124E4C}"/>
+                <a16:creationId xmlns:a16="http://schemas.microsoft.com/office/drawing/2014/main" id="{17D9A00E-948A-0DCA-72C0-1A44CC9C1F29}"/>
               </a:ext>
             </a:extLst>
           </p:cNvPr>
@@ -1599,7 +1599,7 @@
           <p:cNvPr id="7" name="スライド番号プレースホルダー 6">
             <a:extLst>
               <a:ext uri="{FF2B5EF4-FFF2-40B4-BE49-F238E27FC236}">
-                <a16:creationId xmlns:a16="http://schemas.microsoft.com/office/drawing/2014/main" id="{0D5420A5-7389-842E-9F29-50321F4DE65C}"/>
+                <a16:creationId xmlns:a16="http://schemas.microsoft.com/office/drawing/2014/main" id="{2474EFF1-C98C-C811-94EC-EEBCB573B6DB}"/>
               </a:ext>
             </a:extLst>
           </p:cNvPr>
@@ -1615,7 +1615,7 @@
           <a:bodyPr/>
           <a:lstStyle/>
           <a:p>
-            <a:fld id="{B0543E5C-F890-46BD-A667-A456DA8C8562}" type="slidenum">
+            <a:fld id="{7B673B4D-AC4D-46AC-9121-31AA76446341}" type="slidenum">
               <a:rPr kumimoji="1" lang="ja-JP" altLang="en-US" smtClean="0"/>
               <a:t>‹#›</a:t>
             </a:fld>
@@ -1626,7 +1626,7 @@
     </p:spTree>
     <p:extLst>
       <p:ext uri="{BB962C8B-B14F-4D97-AF65-F5344CB8AC3E}">
-        <p14:creationId xmlns:p14="http://schemas.microsoft.com/office/powerpoint/2010/main" val="740913566"/>
+        <p14:creationId xmlns:p14="http://schemas.microsoft.com/office/powerpoint/2010/main" val="1956958413"/>
       </p:ext>
     </p:extLst>
   </p:cSld>
@@ -1658,7 +1658,7 @@
           <p:cNvPr id="2" name="タイトル 1">
             <a:extLst>
               <a:ext uri="{FF2B5EF4-FFF2-40B4-BE49-F238E27FC236}">
-                <a16:creationId xmlns:a16="http://schemas.microsoft.com/office/drawing/2014/main" id="{1C40E093-B266-BC9B-9DD8-5437E81F4A53}"/>
+                <a16:creationId xmlns:a16="http://schemas.microsoft.com/office/drawing/2014/main" id="{7B425D28-FC8D-FA58-037F-56BC333E0429}"/>
               </a:ext>
             </a:extLst>
           </p:cNvPr>
@@ -1691,7 +1691,7 @@
           <p:cNvPr id="3" name="テキスト プレースホルダー 2">
             <a:extLst>
               <a:ext uri="{FF2B5EF4-FFF2-40B4-BE49-F238E27FC236}">
-                <a16:creationId xmlns:a16="http://schemas.microsoft.com/office/drawing/2014/main" id="{0886CBD8-1DEE-28BF-6239-8563E293AD12}"/>
+                <a16:creationId xmlns:a16="http://schemas.microsoft.com/office/drawing/2014/main" id="{BC326D4E-8091-4907-AC37-96A573EAE37B}"/>
               </a:ext>
             </a:extLst>
           </p:cNvPr>
@@ -1762,7 +1762,7 @@
           <p:cNvPr id="4" name="コンテンツ プレースホルダー 3">
             <a:extLst>
               <a:ext uri="{FF2B5EF4-FFF2-40B4-BE49-F238E27FC236}">
-                <a16:creationId xmlns:a16="http://schemas.microsoft.com/office/drawing/2014/main" id="{EE601F49-00E6-105E-9D2C-E4064250F6C9}"/>
+                <a16:creationId xmlns:a16="http://schemas.microsoft.com/office/drawing/2014/main" id="{2B74E7E7-8429-220C-50C5-1A3FA6A83407}"/>
               </a:ext>
             </a:extLst>
           </p:cNvPr>
@@ -1856,7 +1856,7 @@
           <p:cNvPr id="5" name="テキスト プレースホルダー 4">
             <a:extLst>
               <a:ext uri="{FF2B5EF4-FFF2-40B4-BE49-F238E27FC236}">
-                <a16:creationId xmlns:a16="http://schemas.microsoft.com/office/drawing/2014/main" id="{C3DC45E9-8850-5629-F1DA-5F7BDF48448A}"/>
+                <a16:creationId xmlns:a16="http://schemas.microsoft.com/office/drawing/2014/main" id="{BBC0DEB7-E888-DE72-382D-6BE740FC016D}"/>
               </a:ext>
             </a:extLst>
           </p:cNvPr>
@@ -1927,7 +1927,7 @@
           <p:cNvPr id="6" name="コンテンツ プレースホルダー 5">
             <a:extLst>
               <a:ext uri="{FF2B5EF4-FFF2-40B4-BE49-F238E27FC236}">
-                <a16:creationId xmlns:a16="http://schemas.microsoft.com/office/drawing/2014/main" id="{58DE83DC-3BBC-DBA0-B49A-9A784F1DA121}"/>
+                <a16:creationId xmlns:a16="http://schemas.microsoft.com/office/drawing/2014/main" id="{EB97DA76-A479-0B7E-A446-34CA665A3139}"/>
               </a:ext>
             </a:extLst>
           </p:cNvPr>
@@ -2021,7 +2021,7 @@
           <p:cNvPr id="7" name="日付プレースホルダー 6">
             <a:extLst>
               <a:ext uri="{FF2B5EF4-FFF2-40B4-BE49-F238E27FC236}">
-                <a16:creationId xmlns:a16="http://schemas.microsoft.com/office/drawing/2014/main" id="{50400E9B-C2A7-CB13-4BFC-EBD41060EAB9}"/>
+                <a16:creationId xmlns:a16="http://schemas.microsoft.com/office/drawing/2014/main" id="{2394915D-348F-5D27-854C-785F5D816FC7}"/>
               </a:ext>
             </a:extLst>
           </p:cNvPr>
@@ -2037,7 +2037,7 @@
           <a:bodyPr/>
           <a:lstStyle/>
           <a:p>
-            <a:fld id="{B99048E9-CBCF-4E52-B036-1A4B28DE5D42}" type="datetimeFigureOut">
+            <a:fld id="{9489173B-8EFA-459A-934B-7C9EF1259010}" type="datetimeFigureOut">
               <a:rPr kumimoji="1" lang="ja-JP" altLang="en-US" smtClean="0"/>
               <a:t>2026/7/30</a:t>
             </a:fld>
@@ -2050,7 +2050,7 @@
           <p:cNvPr id="8" name="フッター プレースホルダー 7">
             <a:extLst>
               <a:ext uri="{FF2B5EF4-FFF2-40B4-BE49-F238E27FC236}">
-                <a16:creationId xmlns:a16="http://schemas.microsoft.com/office/drawing/2014/main" id="{FA0D134F-FFBF-FCAF-D520-6E2AA934ED7D}"/>
+                <a16:creationId xmlns:a16="http://schemas.microsoft.com/office/drawing/2014/main" id="{0812D8D4-11AC-8E88-ADFD-D96C7BA20604}"/>
               </a:ext>
             </a:extLst>
           </p:cNvPr>
@@ -2075,7 +2075,7 @@
           <p:cNvPr id="9" name="スライド番号プレースホルダー 8">
             <a:extLst>
               <a:ext uri="{FF2B5EF4-FFF2-40B4-BE49-F238E27FC236}">
-                <a16:creationId xmlns:a16="http://schemas.microsoft.com/office/drawing/2014/main" id="{9676E817-B8B2-9B8B-5B48-7DF3DC13CADF}"/>
+                <a16:creationId xmlns:a16="http://schemas.microsoft.com/office/drawing/2014/main" id="{A2204EFA-C620-DFF0-82AD-BF58F4CAD407}"/>
               </a:ext>
             </a:extLst>
           </p:cNvPr>
@@ -2091,7 +2091,7 @@
           <a:bodyPr/>
           <a:lstStyle/>
           <a:p>
-            <a:fld id="{B0543E5C-F890-46BD-A667-A456DA8C8562}" type="slidenum">
+            <a:fld id="{7B673B4D-AC4D-46AC-9121-31AA76446341}" type="slidenum">
               <a:rPr kumimoji="1" lang="ja-JP" altLang="en-US" smtClean="0"/>
               <a:t>‹#›</a:t>
             </a:fld>
@@ -2102,7 +2102,7 @@
     </p:spTree>
     <p:extLst>
       <p:ext uri="{BB962C8B-B14F-4D97-AF65-F5344CB8AC3E}">
-        <p14:creationId xmlns:p14="http://schemas.microsoft.com/office/powerpoint/2010/main" val="1477360135"/>
+        <p14:creationId xmlns:p14="http://schemas.microsoft.com/office/powerpoint/2010/main" val="1433660796"/>
       </p:ext>
     </p:extLst>
   </p:cSld>
@@ -2134,7 +2134,7 @@
           <p:cNvPr id="2" name="タイトル 1">
             <a:extLst>
               <a:ext uri="{FF2B5EF4-FFF2-40B4-BE49-F238E27FC236}">
-                <a16:creationId xmlns:a16="http://schemas.microsoft.com/office/drawing/2014/main" id="{F8FFF1C6-71EC-67A8-2E32-485CD541C9C7}"/>
+                <a16:creationId xmlns:a16="http://schemas.microsoft.com/office/drawing/2014/main" id="{B31BE2BB-FB5D-47CE-3C5A-3F4DB73EE390}"/>
               </a:ext>
             </a:extLst>
           </p:cNvPr>
@@ -2162,7 +2162,7 @@
           <p:cNvPr id="3" name="日付プレースホルダー 2">
             <a:extLst>
               <a:ext uri="{FF2B5EF4-FFF2-40B4-BE49-F238E27FC236}">
-                <a16:creationId xmlns:a16="http://schemas.microsoft.com/office/drawing/2014/main" id="{29A24D52-9E12-21F2-DD41-BF5A55760D2D}"/>
+                <a16:creationId xmlns:a16="http://schemas.microsoft.com/office/drawing/2014/main" id="{FA26DCE3-06C2-4481-F5D5-5A4BBC965319}"/>
               </a:ext>
             </a:extLst>
           </p:cNvPr>
@@ -2178,7 +2178,7 @@
           <a:bodyPr/>
           <a:lstStyle/>
           <a:p>
-            <a:fld id="{B99048E9-CBCF-4E52-B036-1A4B28DE5D42}" type="datetimeFigureOut">
+            <a:fld id="{9489173B-8EFA-459A-934B-7C9EF1259010}" type="datetimeFigureOut">
               <a:rPr kumimoji="1" lang="ja-JP" altLang="en-US" smtClean="0"/>
               <a:t>2026/7/30</a:t>
             </a:fld>
@@ -2191,7 +2191,7 @@
           <p:cNvPr id="4" name="フッター プレースホルダー 3">
             <a:extLst>
               <a:ext uri="{FF2B5EF4-FFF2-40B4-BE49-F238E27FC236}">
-                <a16:creationId xmlns:a16="http://schemas.microsoft.com/office/drawing/2014/main" id="{40652411-384F-9094-6227-7328E5817037}"/>
+                <a16:creationId xmlns:a16="http://schemas.microsoft.com/office/drawing/2014/main" id="{E014B4CD-3E00-7F51-1725-F6ACD2B8D0E3}"/>
               </a:ext>
             </a:extLst>
           </p:cNvPr>
@@ -2216,7 +2216,7 @@
           <p:cNvPr id="5" name="スライド番号プレースホルダー 4">
             <a:extLst>
               <a:ext uri="{FF2B5EF4-FFF2-40B4-BE49-F238E27FC236}">
-                <a16:creationId xmlns:a16="http://schemas.microsoft.com/office/drawing/2014/main" id="{F6DFEB55-4549-DD2F-299D-1B19B4B98E87}"/>
+                <a16:creationId xmlns:a16="http://schemas.microsoft.com/office/drawing/2014/main" id="{11E64322-23D1-520B-33F6-F78CA9E6E41F}"/>
               </a:ext>
             </a:extLst>
           </p:cNvPr>
@@ -2232,7 +2232,7 @@
           <a:bodyPr/>
           <a:lstStyle/>
           <a:p>
-            <a:fld id="{B0543E5C-F890-46BD-A667-A456DA8C8562}" type="slidenum">
+            <a:fld id="{7B673B4D-AC4D-46AC-9121-31AA76446341}" type="slidenum">
               <a:rPr kumimoji="1" lang="ja-JP" altLang="en-US" smtClean="0"/>
               <a:t>‹#›</a:t>
             </a:fld>
@@ -2243,7 +2243,7 @@
     </p:spTree>
     <p:extLst>
       <p:ext uri="{BB962C8B-B14F-4D97-AF65-F5344CB8AC3E}">
-        <p14:creationId xmlns:p14="http://schemas.microsoft.com/office/powerpoint/2010/main" val="644360001"/>
+        <p14:creationId xmlns:p14="http://schemas.microsoft.com/office/powerpoint/2010/main" val="3064980600"/>
       </p:ext>
     </p:extLst>
   </p:cSld>
@@ -2275,7 +2275,7 @@
           <p:cNvPr id="2" name="日付プレースホルダー 1">
             <a:extLst>
               <a:ext uri="{FF2B5EF4-FFF2-40B4-BE49-F238E27FC236}">
-                <a16:creationId xmlns:a16="http://schemas.microsoft.com/office/drawing/2014/main" id="{E6ACE8F4-BA02-AA62-2D31-20FE78004B8D}"/>
+                <a16:creationId xmlns:a16="http://schemas.microsoft.com/office/drawing/2014/main" id="{0A0B0F1B-901A-414A-3166-869DDF74920D}"/>
               </a:ext>
             </a:extLst>
           </p:cNvPr>
@@ -2291,7 +2291,7 @@
           <a:bodyPr/>
           <a:lstStyle/>
           <a:p>
-            <a:fld id="{B99048E9-CBCF-4E52-B036-1A4B28DE5D42}" type="datetimeFigureOut">
+            <a:fld id="{9489173B-8EFA-459A-934B-7C9EF1259010}" type="datetimeFigureOut">
               <a:rPr kumimoji="1" lang="ja-JP" altLang="en-US" smtClean="0"/>
               <a:t>2026/7/30</a:t>
             </a:fld>
@@ -2304,7 +2304,7 @@
           <p:cNvPr id="3" name="フッター プレースホルダー 2">
             <a:extLst>
               <a:ext uri="{FF2B5EF4-FFF2-40B4-BE49-F238E27FC236}">
-                <a16:creationId xmlns:a16="http://schemas.microsoft.com/office/drawing/2014/main" id="{E40B9E39-FF39-7B9F-FDB7-E22CC24BEB4E}"/>
+                <a16:creationId xmlns:a16="http://schemas.microsoft.com/office/drawing/2014/main" id="{BB1018C8-AB84-2078-13EA-0B5BBD31BC3C}"/>
               </a:ext>
             </a:extLst>
           </p:cNvPr>
@@ -2329,7 +2329,7 @@
           <p:cNvPr id="4" name="スライド番号プレースホルダー 3">
             <a:extLst>
               <a:ext uri="{FF2B5EF4-FFF2-40B4-BE49-F238E27FC236}">
-                <a16:creationId xmlns:a16="http://schemas.microsoft.com/office/drawing/2014/main" id="{F2F66095-F0B0-E604-95E7-EA716A9C9313}"/>
+                <a16:creationId xmlns:a16="http://schemas.microsoft.com/office/drawing/2014/main" id="{6AC0B50D-4CEE-4986-00BB-2DD66E048027}"/>
               </a:ext>
             </a:extLst>
           </p:cNvPr>
@@ -2345,7 +2345,7 @@
           <a:bodyPr/>
           <a:lstStyle/>
           <a:p>
-            <a:fld id="{B0543E5C-F890-46BD-A667-A456DA8C8562}" type="slidenum">
+            <a:fld id="{7B673B4D-AC4D-46AC-9121-31AA76446341}" type="slidenum">
               <a:rPr kumimoji="1" lang="ja-JP" altLang="en-US" smtClean="0"/>
               <a:t>‹#›</a:t>
             </a:fld>
@@ -2356,7 +2356,7 @@
     </p:spTree>
     <p:extLst>
       <p:ext uri="{BB962C8B-B14F-4D97-AF65-F5344CB8AC3E}">
-        <p14:creationId xmlns:p14="http://schemas.microsoft.com/office/powerpoint/2010/main" val="2967972540"/>
+        <p14:creationId xmlns:p14="http://schemas.microsoft.com/office/powerpoint/2010/main" val="3931431333"/>
       </p:ext>
     </p:extLst>
   </p:cSld>
@@ -2388,7 +2388,7 @@
           <p:cNvPr id="2" name="タイトル 1">
             <a:extLst>
               <a:ext uri="{FF2B5EF4-FFF2-40B4-BE49-F238E27FC236}">
-                <a16:creationId xmlns:a16="http://schemas.microsoft.com/office/drawing/2014/main" id="{3747789A-B004-44D4-EA13-4A50FE81D93B}"/>
+                <a16:creationId xmlns:a16="http://schemas.microsoft.com/office/drawing/2014/main" id="{CA86749A-1768-8949-26CC-21B6211EBD33}"/>
               </a:ext>
             </a:extLst>
           </p:cNvPr>
@@ -2425,7 +2425,7 @@
           <p:cNvPr id="3" name="コンテンツ プレースホルダー 2">
             <a:extLst>
               <a:ext uri="{FF2B5EF4-FFF2-40B4-BE49-F238E27FC236}">
-                <a16:creationId xmlns:a16="http://schemas.microsoft.com/office/drawing/2014/main" id="{4CE41E68-2E3C-C8D3-3D20-DAF3AEF0A1F8}"/>
+                <a16:creationId xmlns:a16="http://schemas.microsoft.com/office/drawing/2014/main" id="{CDD12763-2682-A792-9553-E1B0168B186D}"/>
               </a:ext>
             </a:extLst>
           </p:cNvPr>
@@ -2547,7 +2547,7 @@
           <p:cNvPr id="4" name="テキスト プレースホルダー 3">
             <a:extLst>
               <a:ext uri="{FF2B5EF4-FFF2-40B4-BE49-F238E27FC236}">
-                <a16:creationId xmlns:a16="http://schemas.microsoft.com/office/drawing/2014/main" id="{7732A01E-65E8-7187-B56D-62B84DCE98D2}"/>
+                <a16:creationId xmlns:a16="http://schemas.microsoft.com/office/drawing/2014/main" id="{B0CDF7D6-0AFB-97D7-22C3-B635D611BAA2}"/>
               </a:ext>
             </a:extLst>
           </p:cNvPr>
@@ -2618,7 +2618,7 @@
           <p:cNvPr id="5" name="日付プレースホルダー 4">
             <a:extLst>
               <a:ext uri="{FF2B5EF4-FFF2-40B4-BE49-F238E27FC236}">
-                <a16:creationId xmlns:a16="http://schemas.microsoft.com/office/drawing/2014/main" id="{214349CE-7302-DFBD-D82A-03EC0B7FFF97}"/>
+                <a16:creationId xmlns:a16="http://schemas.microsoft.com/office/drawing/2014/main" id="{EFF295DE-22CB-4F0F-D51C-F3B6C0BAE831}"/>
               </a:ext>
             </a:extLst>
           </p:cNvPr>
@@ -2634,7 +2634,7 @@
           <a:bodyPr/>
           <a:lstStyle/>
           <a:p>
-            <a:fld id="{B99048E9-CBCF-4E52-B036-1A4B28DE5D42}" type="datetimeFigureOut">
+            <a:fld id="{9489173B-8EFA-459A-934B-7C9EF1259010}" type="datetimeFigureOut">
               <a:rPr kumimoji="1" lang="ja-JP" altLang="en-US" smtClean="0"/>
               <a:t>2026/7/30</a:t>
             </a:fld>
@@ -2647,7 +2647,7 @@
           <p:cNvPr id="6" name="フッター プレースホルダー 5">
             <a:extLst>
               <a:ext uri="{FF2B5EF4-FFF2-40B4-BE49-F238E27FC236}">
-                <a16:creationId xmlns:a16="http://schemas.microsoft.com/office/drawing/2014/main" id="{68CD42FC-7ED4-1296-94BF-3B38489A9978}"/>
+                <a16:creationId xmlns:a16="http://schemas.microsoft.com/office/drawing/2014/main" id="{05113B63-E006-4383-91E3-32609B5B5D9A}"/>
               </a:ext>
             </a:extLst>
           </p:cNvPr>
@@ -2672,7 +2672,7 @@
           <p:cNvPr id="7" name="スライド番号プレースホルダー 6">
             <a:extLst>
               <a:ext uri="{FF2B5EF4-FFF2-40B4-BE49-F238E27FC236}">
-                <a16:creationId xmlns:a16="http://schemas.microsoft.com/office/drawing/2014/main" id="{58ADF9C4-C8BB-56B0-B73A-4071A0A02F01}"/>
+                <a16:creationId xmlns:a16="http://schemas.microsoft.com/office/drawing/2014/main" id="{487E40A1-FF5F-C1BD-762D-1B0DA6C082B0}"/>
               </a:ext>
             </a:extLst>
           </p:cNvPr>
@@ -2688,7 +2688,7 @@
           <a:bodyPr/>
           <a:lstStyle/>
           <a:p>
-            <a:fld id="{B0543E5C-F890-46BD-A667-A456DA8C8562}" type="slidenum">
+            <a:fld id="{7B673B4D-AC4D-46AC-9121-31AA76446341}" type="slidenum">
               <a:rPr kumimoji="1" lang="ja-JP" altLang="en-US" smtClean="0"/>
               <a:t>‹#›</a:t>
             </a:fld>
@@ -2699,7 +2699,7 @@
     </p:spTree>
     <p:extLst>
       <p:ext uri="{BB962C8B-B14F-4D97-AF65-F5344CB8AC3E}">
-        <p14:creationId xmlns:p14="http://schemas.microsoft.com/office/powerpoint/2010/main" val="1844998188"/>
+        <p14:creationId xmlns:p14="http://schemas.microsoft.com/office/powerpoint/2010/main" val="3302755837"/>
       </p:ext>
     </p:extLst>
   </p:cSld>
@@ -2731,7 +2731,7 @@
           <p:cNvPr id="2" name="タイトル 1">
             <a:extLst>
               <a:ext uri="{FF2B5EF4-FFF2-40B4-BE49-F238E27FC236}">
-                <a16:creationId xmlns:a16="http://schemas.microsoft.com/office/drawing/2014/main" id="{2EDFE61A-CF76-F894-09C4-B68D391622FE}"/>
+                <a16:creationId xmlns:a16="http://schemas.microsoft.com/office/drawing/2014/main" id="{C90D6CF3-3315-6040-30C7-161F225D42C0}"/>
               </a:ext>
             </a:extLst>
           </p:cNvPr>
@@ -2768,7 +2768,7 @@
           <p:cNvPr id="3" name="図プレースホルダー 2">
             <a:extLst>
               <a:ext uri="{FF2B5EF4-FFF2-40B4-BE49-F238E27FC236}">
-                <a16:creationId xmlns:a16="http://schemas.microsoft.com/office/drawing/2014/main" id="{ECA46B14-F1BE-34E1-47CB-4A80A9752680}"/>
+                <a16:creationId xmlns:a16="http://schemas.microsoft.com/office/drawing/2014/main" id="{BC8330CD-EC33-3CB0-7554-5B58FC27BAAB}"/>
               </a:ext>
             </a:extLst>
           </p:cNvPr>
@@ -2835,7 +2835,7 @@
           <p:cNvPr id="4" name="テキスト プレースホルダー 3">
             <a:extLst>
               <a:ext uri="{FF2B5EF4-FFF2-40B4-BE49-F238E27FC236}">
-                <a16:creationId xmlns:a16="http://schemas.microsoft.com/office/drawing/2014/main" id="{0D21F0BD-C206-81D0-1A86-51353D630CC2}"/>
+                <a16:creationId xmlns:a16="http://schemas.microsoft.com/office/drawing/2014/main" id="{740A03A8-E857-C9A3-146C-E4CDA34765A4}"/>
               </a:ext>
             </a:extLst>
           </p:cNvPr>
@@ -2906,7 +2906,7 @@
           <p:cNvPr id="5" name="日付プレースホルダー 4">
             <a:extLst>
               <a:ext uri="{FF2B5EF4-FFF2-40B4-BE49-F238E27FC236}">
-                <a16:creationId xmlns:a16="http://schemas.microsoft.com/office/drawing/2014/main" id="{4BE58A73-D6BF-9549-C464-EC77218DE7EF}"/>
+                <a16:creationId xmlns:a16="http://schemas.microsoft.com/office/drawing/2014/main" id="{F7331D78-8201-DCD4-EAE7-2CB57CFC54EE}"/>
               </a:ext>
             </a:extLst>
           </p:cNvPr>
@@ -2922,7 +2922,7 @@
           <a:bodyPr/>
           <a:lstStyle/>
           <a:p>
-            <a:fld id="{B99048E9-CBCF-4E52-B036-1A4B28DE5D42}" type="datetimeFigureOut">
+            <a:fld id="{9489173B-8EFA-459A-934B-7C9EF1259010}" type="datetimeFigureOut">
               <a:rPr kumimoji="1" lang="ja-JP" altLang="en-US" smtClean="0"/>
               <a:t>2026/7/30</a:t>
             </a:fld>
@@ -2935,7 +2935,7 @@
           <p:cNvPr id="6" name="フッター プレースホルダー 5">
             <a:extLst>
               <a:ext uri="{FF2B5EF4-FFF2-40B4-BE49-F238E27FC236}">
-                <a16:creationId xmlns:a16="http://schemas.microsoft.com/office/drawing/2014/main" id="{7D54559A-F8E7-C112-500F-BE3EE2746129}"/>
+                <a16:creationId xmlns:a16="http://schemas.microsoft.com/office/drawing/2014/main" id="{F5BA624C-19AF-621D-A2EA-1A5511BFF076}"/>
               </a:ext>
             </a:extLst>
           </p:cNvPr>
@@ -2960,7 +2960,7 @@
           <p:cNvPr id="7" name="スライド番号プレースホルダー 6">
             <a:extLst>
               <a:ext uri="{FF2B5EF4-FFF2-40B4-BE49-F238E27FC236}">
-                <a16:creationId xmlns:a16="http://schemas.microsoft.com/office/drawing/2014/main" id="{ED779296-7D12-CDA0-3932-FABAA0A790D6}"/>
+                <a16:creationId xmlns:a16="http://schemas.microsoft.com/office/drawing/2014/main" id="{8F936FA9-B6C5-7788-38B7-D8203C51F620}"/>
               </a:ext>
             </a:extLst>
           </p:cNvPr>
@@ -2976,7 +2976,7 @@
           <a:bodyPr/>
           <a:lstStyle/>
           <a:p>
-            <a:fld id="{B0543E5C-F890-46BD-A667-A456DA8C8562}" type="slidenum">
+            <a:fld id="{7B673B4D-AC4D-46AC-9121-31AA76446341}" type="slidenum">
               <a:rPr kumimoji="1" lang="ja-JP" altLang="en-US" smtClean="0"/>
               <a:t>‹#›</a:t>
             </a:fld>
@@ -2987,7 +2987,7 @@
     </p:spTree>
     <p:extLst>
       <p:ext uri="{BB962C8B-B14F-4D97-AF65-F5344CB8AC3E}">
-        <p14:creationId xmlns:p14="http://schemas.microsoft.com/office/powerpoint/2010/main" val="2397726951"/>
+        <p14:creationId xmlns:p14="http://schemas.microsoft.com/office/powerpoint/2010/main" val="2733790390"/>
       </p:ext>
     </p:extLst>
   </p:cSld>
@@ -3024,7 +3024,7 @@
           <p:cNvPr id="2" name="タイトル プレースホルダー 1">
             <a:extLst>
               <a:ext uri="{FF2B5EF4-FFF2-40B4-BE49-F238E27FC236}">
-                <a16:creationId xmlns:a16="http://schemas.microsoft.com/office/drawing/2014/main" id="{9FD811A0-7164-02C3-504D-A37FDD121041}"/>
+                <a16:creationId xmlns:a16="http://schemas.microsoft.com/office/drawing/2014/main" id="{D515E35E-3A0D-F8FD-43DB-11CE254D525F}"/>
               </a:ext>
             </a:extLst>
           </p:cNvPr>
@@ -3062,7 +3062,7 @@
           <p:cNvPr id="3" name="テキスト プレースホルダー 2">
             <a:extLst>
               <a:ext uri="{FF2B5EF4-FFF2-40B4-BE49-F238E27FC236}">
-                <a16:creationId xmlns:a16="http://schemas.microsoft.com/office/drawing/2014/main" id="{24FEEC73-8CF7-EA1A-A1F6-207D934613E0}"/>
+                <a16:creationId xmlns:a16="http://schemas.microsoft.com/office/drawing/2014/main" id="{327BB175-0C2F-4F0D-5A15-2403AD6D7BC9}"/>
               </a:ext>
             </a:extLst>
           </p:cNvPr>
@@ -3161,7 +3161,7 @@
           <p:cNvPr id="4" name="日付プレースホルダー 3">
             <a:extLst>
               <a:ext uri="{FF2B5EF4-FFF2-40B4-BE49-F238E27FC236}">
-                <a16:creationId xmlns:a16="http://schemas.microsoft.com/office/drawing/2014/main" id="{79F1AF43-E13C-4AA0-6466-D512B30A8F30}"/>
+                <a16:creationId xmlns:a16="http://schemas.microsoft.com/office/drawing/2014/main" id="{D19C801D-67FA-A0A9-802F-FAF5F5969972}"/>
               </a:ext>
             </a:extLst>
           </p:cNvPr>
@@ -3195,7 +3195,7 @@
             </a:lvl1pPr>
           </a:lstStyle>
           <a:p>
-            <a:fld id="{B99048E9-CBCF-4E52-B036-1A4B28DE5D42}" type="datetimeFigureOut">
+            <a:fld id="{9489173B-8EFA-459A-934B-7C9EF1259010}" type="datetimeFigureOut">
               <a:rPr kumimoji="1" lang="ja-JP" altLang="en-US" smtClean="0"/>
               <a:t>2026/7/30</a:t>
             </a:fld>
@@ -3208,7 +3208,7 @@
           <p:cNvPr id="5" name="フッター プレースホルダー 4">
             <a:extLst>
               <a:ext uri="{FF2B5EF4-FFF2-40B4-BE49-F238E27FC236}">
-                <a16:creationId xmlns:a16="http://schemas.microsoft.com/office/drawing/2014/main" id="{4846EF9C-404F-40CE-69FB-64BDA801C0C5}"/>
+                <a16:creationId xmlns:a16="http://schemas.microsoft.com/office/drawing/2014/main" id="{3FD83050-0EBC-B995-2A9B-D3452F7BF3A3}"/>
               </a:ext>
             </a:extLst>
           </p:cNvPr>
@@ -3251,7 +3251,7 @@
           <p:cNvPr id="6" name="スライド番号プレースホルダー 5">
             <a:extLst>
               <a:ext uri="{FF2B5EF4-FFF2-40B4-BE49-F238E27FC236}">
-                <a16:creationId xmlns:a16="http://schemas.microsoft.com/office/drawing/2014/main" id="{89713F37-F921-5802-709F-3BDB98D3ED47}"/>
+                <a16:creationId xmlns:a16="http://schemas.microsoft.com/office/drawing/2014/main" id="{42A7ED8C-0AF9-A09D-361B-00877CEBB490}"/>
               </a:ext>
             </a:extLst>
           </p:cNvPr>
@@ -3285,7 +3285,7 @@
             </a:lvl1pPr>
           </a:lstStyle>
           <a:p>
-            <a:fld id="{B0543E5C-F890-46BD-A667-A456DA8C8562}" type="slidenum">
+            <a:fld id="{7B673B4D-AC4D-46AC-9121-31AA76446341}" type="slidenum">
               <a:rPr kumimoji="1" lang="ja-JP" altLang="en-US" smtClean="0"/>
               <a:t>‹#›</a:t>
             </a:fld>
@@ -3296,7 +3296,7 @@
     </p:spTree>
     <p:extLst>
       <p:ext uri="{BB962C8B-B14F-4D97-AF65-F5344CB8AC3E}">
-        <p14:creationId xmlns:p14="http://schemas.microsoft.com/office/powerpoint/2010/main" val="3155531920"/>
+        <p14:creationId xmlns:p14="http://schemas.microsoft.com/office/powerpoint/2010/main" val="1698283954"/>
       </p:ext>
     </p:extLst>
   </p:cSld>
@@ -3619,7 +3619,7 @@
           <p:cNvPr id="2" name="テキスト ボックス 1">
             <a:extLst>
               <a:ext uri="{FF2B5EF4-FFF2-40B4-BE49-F238E27FC236}">
-                <a16:creationId xmlns:a16="http://schemas.microsoft.com/office/drawing/2014/main" id="{C2045D43-4D11-C9DA-B021-209B76773A71}"/>
+                <a16:creationId xmlns:a16="http://schemas.microsoft.com/office/drawing/2014/main" id="{87C52D90-AFE2-85FC-166B-FA9194F1FADA}"/>
               </a:ext>
             </a:extLst>
           </p:cNvPr>
@@ -3665,7 +3665,7 @@
           <p:cNvPr id="3" name="テキスト ボックス 2">
             <a:extLst>
               <a:ext uri="{FF2B5EF4-FFF2-40B4-BE49-F238E27FC236}">
-                <a16:creationId xmlns:a16="http://schemas.microsoft.com/office/drawing/2014/main" id="{0179AC1E-3C3C-04A8-2673-C0201726C948}"/>
+                <a16:creationId xmlns:a16="http://schemas.microsoft.com/office/drawing/2014/main" id="{B5957B14-1995-EC91-5FF7-8FDD0BDBA7BC}"/>
               </a:ext>
             </a:extLst>
           </p:cNvPr>
@@ -3714,7 +3714,7 @@
           <p:cNvPr id="4" name="テキスト ボックス 3">
             <a:extLst>
               <a:ext uri="{FF2B5EF4-FFF2-40B4-BE49-F238E27FC236}">
-                <a16:creationId xmlns:a16="http://schemas.microsoft.com/office/drawing/2014/main" id="{AF91B5A5-C657-2CA4-F057-D0ED06E57409}"/>
+                <a16:creationId xmlns:a16="http://schemas.microsoft.com/office/drawing/2014/main" id="{95F9EC2B-8E5D-F891-F055-B9E0343B2297}"/>
               </a:ext>
             </a:extLst>
           </p:cNvPr>
@@ -3754,7 +3754,7 @@
           <p:cNvPr id="5" name="テキスト ボックス 4">
             <a:extLst>
               <a:ext uri="{FF2B5EF4-FFF2-40B4-BE49-F238E27FC236}">
-                <a16:creationId xmlns:a16="http://schemas.microsoft.com/office/drawing/2014/main" id="{D9CA8413-EED8-AD27-D849-52A31C1A2F0D}"/>
+                <a16:creationId xmlns:a16="http://schemas.microsoft.com/office/drawing/2014/main" id="{B37D2C3E-A4A1-A7C8-C421-D7E6E0D9D259}"/>
               </a:ext>
             </a:extLst>
           </p:cNvPr>
@@ -3801,7 +3801,7 @@
             <a:hlinkClick r:id="" action="ppaction://media"/>
             <a:extLst>
               <a:ext uri="{FF2B5EF4-FFF2-40B4-BE49-F238E27FC236}">
-                <a16:creationId xmlns:a16="http://schemas.microsoft.com/office/drawing/2014/main" id="{40B0D9BC-2AF3-D86B-0A5A-5103E0DCB2CB}"/>
+                <a16:creationId xmlns:a16="http://schemas.microsoft.com/office/drawing/2014/main" id="{657A5847-FAEA-CD73-3E69-83A31F59F3A9}"/>
               </a:ext>
             </a:extLst>
           </p:cNvPr>
@@ -3836,7 +3836,7 @@
     </p:spTree>
     <p:extLst>
       <p:ext uri="{BB962C8B-B14F-4D97-AF65-F5344CB8AC3E}">
-        <p14:creationId xmlns:p14="http://schemas.microsoft.com/office/powerpoint/2010/main" val="3435767625"/>
+        <p14:creationId xmlns:p14="http://schemas.microsoft.com/office/powerpoint/2010/main" val="1476574515"/>
       </p:ext>
     </p:extLst>
   </p:cSld>
@@ -3960,7 +3960,7 @@
           <p:cNvPr id="2" name="テキスト ボックス 1">
             <a:extLst>
               <a:ext uri="{FF2B5EF4-FFF2-40B4-BE49-F238E27FC236}">
-                <a16:creationId xmlns:a16="http://schemas.microsoft.com/office/drawing/2014/main" id="{2A862317-70A3-F466-2415-952D6B3AB1AF}"/>
+                <a16:creationId xmlns:a16="http://schemas.microsoft.com/office/drawing/2014/main" id="{A49ED9E4-FA3B-16BA-5E2E-83E6B4A6DA3C}"/>
               </a:ext>
             </a:extLst>
           </p:cNvPr>
@@ -4006,7 +4006,7 @@
           <p:cNvPr id="3" name="テキスト ボックス 2">
             <a:extLst>
               <a:ext uri="{FF2B5EF4-FFF2-40B4-BE49-F238E27FC236}">
-                <a16:creationId xmlns:a16="http://schemas.microsoft.com/office/drawing/2014/main" id="{BD5605BF-5E3C-A19A-FB41-B602299EF5D0}"/>
+                <a16:creationId xmlns:a16="http://schemas.microsoft.com/office/drawing/2014/main" id="{74BDDA19-497E-BA0E-5B36-B6BC2EAA1299}"/>
               </a:ext>
             </a:extLst>
           </p:cNvPr>
@@ -4046,7 +4046,7 @@
           <p:cNvPr id="4" name="テキスト ボックス 3">
             <a:extLst>
               <a:ext uri="{FF2B5EF4-FFF2-40B4-BE49-F238E27FC236}">
-                <a16:creationId xmlns:a16="http://schemas.microsoft.com/office/drawing/2014/main" id="{C8303F42-205E-8E77-0E07-E53A00BDC2F3}"/>
+                <a16:creationId xmlns:a16="http://schemas.microsoft.com/office/drawing/2014/main" id="{A52244CF-0B9D-CF13-8D11-6D1769408F5C}"/>
               </a:ext>
             </a:extLst>
           </p:cNvPr>
@@ -4110,7 +4110,7 @@
           <p:cNvPr id="5" name="テキスト ボックス 4">
             <a:extLst>
               <a:ext uri="{FF2B5EF4-FFF2-40B4-BE49-F238E27FC236}">
-                <a16:creationId xmlns:a16="http://schemas.microsoft.com/office/drawing/2014/main" id="{00B32044-514A-1A60-3006-CA36F0D4DE7F}"/>
+                <a16:creationId xmlns:a16="http://schemas.microsoft.com/office/drawing/2014/main" id="{AF9AA6D6-B811-097A-5C2A-28BD5D5086B0}"/>
               </a:ext>
             </a:extLst>
           </p:cNvPr>
@@ -4157,7 +4157,7 @@
             <a:hlinkClick r:id="" action="ppaction://media"/>
             <a:extLst>
               <a:ext uri="{FF2B5EF4-FFF2-40B4-BE49-F238E27FC236}">
-                <a16:creationId xmlns:a16="http://schemas.microsoft.com/office/drawing/2014/main" id="{DC6EFF31-036E-A77F-1A6D-436F6C010446}"/>
+                <a16:creationId xmlns:a16="http://schemas.microsoft.com/office/drawing/2014/main" id="{45223954-67A3-F731-BA1D-9FD88D4FEF40}"/>
               </a:ext>
             </a:extLst>
           </p:cNvPr>
@@ -4192,7 +4192,7 @@
     </p:spTree>
     <p:extLst>
       <p:ext uri="{BB962C8B-B14F-4D97-AF65-F5344CB8AC3E}">
-        <p14:creationId xmlns:p14="http://schemas.microsoft.com/office/powerpoint/2010/main" val="244521152"/>
+        <p14:creationId xmlns:p14="http://schemas.microsoft.com/office/powerpoint/2010/main" val="419298207"/>
       </p:ext>
     </p:extLst>
   </p:cSld>
@@ -4316,7 +4316,7 @@
           <p:cNvPr id="2" name="テキスト ボックス 1">
             <a:extLst>
               <a:ext uri="{FF2B5EF4-FFF2-40B4-BE49-F238E27FC236}">
-                <a16:creationId xmlns:a16="http://schemas.microsoft.com/office/drawing/2014/main" id="{38DF8653-7318-1705-C211-7246A553661C}"/>
+                <a16:creationId xmlns:a16="http://schemas.microsoft.com/office/drawing/2014/main" id="{3D6D176E-426F-A1E6-BD58-48E3AD603AFD}"/>
               </a:ext>
             </a:extLst>
           </p:cNvPr>
@@ -4362,7 +4362,7 @@
           <p:cNvPr id="3" name="テキスト ボックス 2">
             <a:extLst>
               <a:ext uri="{FF2B5EF4-FFF2-40B4-BE49-F238E27FC236}">
-                <a16:creationId xmlns:a16="http://schemas.microsoft.com/office/drawing/2014/main" id="{73E41FD9-F801-C047-2D16-89DBE6C8DAF0}"/>
+                <a16:creationId xmlns:a16="http://schemas.microsoft.com/office/drawing/2014/main" id="{71D62D94-A427-4E30-1098-A1DAF5C835D1}"/>
               </a:ext>
             </a:extLst>
           </p:cNvPr>
@@ -4402,7 +4402,7 @@
           <p:cNvPr id="4" name="テキスト ボックス 3">
             <a:extLst>
               <a:ext uri="{FF2B5EF4-FFF2-40B4-BE49-F238E27FC236}">
-                <a16:creationId xmlns:a16="http://schemas.microsoft.com/office/drawing/2014/main" id="{74426FD5-0AA0-8A2E-7801-6AF061162D29}"/>
+                <a16:creationId xmlns:a16="http://schemas.microsoft.com/office/drawing/2014/main" id="{EB04939B-0735-006E-B110-794CC79684F6}"/>
               </a:ext>
             </a:extLst>
           </p:cNvPr>
@@ -4497,7 +4497,7 @@
           <p:cNvPr id="5" name="テキスト ボックス 4">
             <a:extLst>
               <a:ext uri="{FF2B5EF4-FFF2-40B4-BE49-F238E27FC236}">
-                <a16:creationId xmlns:a16="http://schemas.microsoft.com/office/drawing/2014/main" id="{B46FE1AE-2F90-983E-D967-F92AA4798EC9}"/>
+                <a16:creationId xmlns:a16="http://schemas.microsoft.com/office/drawing/2014/main" id="{17F46E66-A6C6-E95A-6DE4-7074A5AFBA50}"/>
               </a:ext>
             </a:extLst>
           </p:cNvPr>
@@ -4544,7 +4544,7 @@
             <a:hlinkClick r:id="" action="ppaction://media"/>
             <a:extLst>
               <a:ext uri="{FF2B5EF4-FFF2-40B4-BE49-F238E27FC236}">
-                <a16:creationId xmlns:a16="http://schemas.microsoft.com/office/drawing/2014/main" id="{72257CF0-6142-168C-B6F7-CB7869C5A9CE}"/>
+                <a16:creationId xmlns:a16="http://schemas.microsoft.com/office/drawing/2014/main" id="{269E8760-89A8-C5DB-05BE-0AED963D1776}"/>
               </a:ext>
             </a:extLst>
           </p:cNvPr>
@@ -4579,7 +4579,7 @@
     </p:spTree>
     <p:extLst>
       <p:ext uri="{BB962C8B-B14F-4D97-AF65-F5344CB8AC3E}">
-        <p14:creationId xmlns:p14="http://schemas.microsoft.com/office/powerpoint/2010/main" val="720030172"/>
+        <p14:creationId xmlns:p14="http://schemas.microsoft.com/office/powerpoint/2010/main" val="1949880446"/>
       </p:ext>
     </p:extLst>
   </p:cSld>
@@ -4703,7 +4703,7 @@
           <p:cNvPr id="2" name="テキスト ボックス 1">
             <a:extLst>
               <a:ext uri="{FF2B5EF4-FFF2-40B4-BE49-F238E27FC236}">
-                <a16:creationId xmlns:a16="http://schemas.microsoft.com/office/drawing/2014/main" id="{A17E3B46-07FE-2C16-C585-429534F901C9}"/>
+                <a16:creationId xmlns:a16="http://schemas.microsoft.com/office/drawing/2014/main" id="{60CC44CB-3112-BABE-FD27-03C8EFD9E5AE}"/>
               </a:ext>
             </a:extLst>
           </p:cNvPr>
@@ -4749,7 +4749,7 @@
           <p:cNvPr id="3" name="テキスト ボックス 2">
             <a:extLst>
               <a:ext uri="{FF2B5EF4-FFF2-40B4-BE49-F238E27FC236}">
-                <a16:creationId xmlns:a16="http://schemas.microsoft.com/office/drawing/2014/main" id="{3F9D6C63-B556-127C-3D21-DF794883E813}"/>
+                <a16:creationId xmlns:a16="http://schemas.microsoft.com/office/drawing/2014/main" id="{E1044B63-1F79-8EE7-1481-95A082CCA379}"/>
               </a:ext>
             </a:extLst>
           </p:cNvPr>
@@ -4789,7 +4789,7 @@
           <p:cNvPr id="4" name="テキスト ボックス 3">
             <a:extLst>
               <a:ext uri="{FF2B5EF4-FFF2-40B4-BE49-F238E27FC236}">
-                <a16:creationId xmlns:a16="http://schemas.microsoft.com/office/drawing/2014/main" id="{328D5F12-CFE3-EBDC-0E1D-7918E23E8EAA}"/>
+                <a16:creationId xmlns:a16="http://schemas.microsoft.com/office/drawing/2014/main" id="{2248B440-8C41-F919-5832-4A0BC4F5FCCF}"/>
               </a:ext>
             </a:extLst>
           </p:cNvPr>
@@ -4899,7 +4899,7 @@
           <p:cNvPr id="5" name="テキスト ボックス 4">
             <a:extLst>
               <a:ext uri="{FF2B5EF4-FFF2-40B4-BE49-F238E27FC236}">
-                <a16:creationId xmlns:a16="http://schemas.microsoft.com/office/drawing/2014/main" id="{C589E2B1-AB83-556E-7855-B92CA93FDC4E}"/>
+                <a16:creationId xmlns:a16="http://schemas.microsoft.com/office/drawing/2014/main" id="{98F7AD80-7CC4-7270-25D8-F28439B31D7E}"/>
               </a:ext>
             </a:extLst>
           </p:cNvPr>
@@ -4946,7 +4946,7 @@
             <a:hlinkClick r:id="" action="ppaction://media"/>
             <a:extLst>
               <a:ext uri="{FF2B5EF4-FFF2-40B4-BE49-F238E27FC236}">
-                <a16:creationId xmlns:a16="http://schemas.microsoft.com/office/drawing/2014/main" id="{2C1382BA-89A9-DACC-1466-3B0789B99B1C}"/>
+                <a16:creationId xmlns:a16="http://schemas.microsoft.com/office/drawing/2014/main" id="{89282A20-9243-F019-D141-E507ECF3A523}"/>
               </a:ext>
             </a:extLst>
           </p:cNvPr>
@@ -4981,7 +4981,7 @@
     </p:spTree>
     <p:extLst>
       <p:ext uri="{BB962C8B-B14F-4D97-AF65-F5344CB8AC3E}">
-        <p14:creationId xmlns:p14="http://schemas.microsoft.com/office/powerpoint/2010/main" val="537104996"/>
+        <p14:creationId xmlns:p14="http://schemas.microsoft.com/office/powerpoint/2010/main" val="699923945"/>
       </p:ext>
     </p:extLst>
   </p:cSld>
@@ -5105,7 +5105,7 @@
           <p:cNvPr id="2" name="テキスト ボックス 1">
             <a:extLst>
               <a:ext uri="{FF2B5EF4-FFF2-40B4-BE49-F238E27FC236}">
-                <a16:creationId xmlns:a16="http://schemas.microsoft.com/office/drawing/2014/main" id="{2F72359C-BBFA-F9D4-6363-BB1103EA6F0A}"/>
+                <a16:creationId xmlns:a16="http://schemas.microsoft.com/office/drawing/2014/main" id="{FFE7534E-E1AF-CD90-DA8F-9B8DE3692D8E}"/>
               </a:ext>
             </a:extLst>
           </p:cNvPr>
@@ -5151,7 +5151,7 @@
           <p:cNvPr id="3" name="テキスト ボックス 2">
             <a:extLst>
               <a:ext uri="{FF2B5EF4-FFF2-40B4-BE49-F238E27FC236}">
-                <a16:creationId xmlns:a16="http://schemas.microsoft.com/office/drawing/2014/main" id="{0FF41AD2-8157-895C-3C06-9FB6852ED27D}"/>
+                <a16:creationId xmlns:a16="http://schemas.microsoft.com/office/drawing/2014/main" id="{8DDA8741-4EA6-914B-B9DE-421D0E248BDD}"/>
               </a:ext>
             </a:extLst>
           </p:cNvPr>
@@ -5191,7 +5191,7 @@
           <p:cNvPr id="4" name="テキスト ボックス 3">
             <a:extLst>
               <a:ext uri="{FF2B5EF4-FFF2-40B4-BE49-F238E27FC236}">
-                <a16:creationId xmlns:a16="http://schemas.microsoft.com/office/drawing/2014/main" id="{23E86810-6322-B6C0-E9AA-34749BAB74A6}"/>
+                <a16:creationId xmlns:a16="http://schemas.microsoft.com/office/drawing/2014/main" id="{0BC8D8DE-73F8-1B08-21F8-B3BD92E0D1D1}"/>
               </a:ext>
             </a:extLst>
           </p:cNvPr>
@@ -5215,20 +5215,14 @@
           <a:lstStyle/>
           <a:p>
             <a:r>
-              <a:rPr kumimoji="1" lang="en-US" altLang="ja-JP" sz="2000">
+              <a:rPr kumimoji="1" lang="ja-JP" altLang="en-US" sz="2000">
                 <a:solidFill>
                   <a:srgbClr val="333333"/>
                 </a:solidFill>
                 <a:latin typeface="Arial" panose="020B0604020202020204" pitchFamily="34" charset="0"/>
               </a:rPr>
-              <a:t>Set confirmed custom domain</a:t>
-            </a:r>
-            <a:endParaRPr kumimoji="1" lang="ja-JP" altLang="en-US" sz="2000">
-              <a:solidFill>
-                <a:srgbClr val="333333"/>
-              </a:solidFill>
-              <a:latin typeface="Arial" panose="020B0604020202020204" pitchFamily="34" charset="0"/>
-            </a:endParaRPr>
+              <a:t>直近のコミットでは、実装の見直しと継続的な改善が行われました。</a:t>
+            </a:r>
           </a:p>
         </p:txBody>
       </p:sp>
@@ -5237,7 +5231,7 @@
           <p:cNvPr id="5" name="テキスト ボックス 4">
             <a:extLst>
               <a:ext uri="{FF2B5EF4-FFF2-40B4-BE49-F238E27FC236}">
-                <a16:creationId xmlns:a16="http://schemas.microsoft.com/office/drawing/2014/main" id="{12834C87-B79C-53DA-8EA6-64C2094746EE}"/>
+                <a16:creationId xmlns:a16="http://schemas.microsoft.com/office/drawing/2014/main" id="{CB2CE44A-DE6F-E961-B61C-8C95002998F6}"/>
               </a:ext>
             </a:extLst>
           </p:cNvPr>
@@ -5284,7 +5278,7 @@
             <a:hlinkClick r:id="" action="ppaction://media"/>
             <a:extLst>
               <a:ext uri="{FF2B5EF4-FFF2-40B4-BE49-F238E27FC236}">
-                <a16:creationId xmlns:a16="http://schemas.microsoft.com/office/drawing/2014/main" id="{8A98D174-6E3A-3430-B5AC-6F4220C31E11}"/>
+                <a16:creationId xmlns:a16="http://schemas.microsoft.com/office/drawing/2014/main" id="{AB38C22D-3EAC-3E7A-F785-DD0B13AB110A}"/>
               </a:ext>
             </a:extLst>
           </p:cNvPr>
@@ -5319,7 +5313,7 @@
     </p:spTree>
     <p:extLst>
       <p:ext uri="{BB962C8B-B14F-4D97-AF65-F5344CB8AC3E}">
-        <p14:creationId xmlns:p14="http://schemas.microsoft.com/office/powerpoint/2010/main" val="1147767097"/>
+        <p14:creationId xmlns:p14="http://schemas.microsoft.com/office/powerpoint/2010/main" val="691462203"/>
       </p:ext>
     </p:extLst>
   </p:cSld>
@@ -5362,7 +5356,7 @@
                                   <p:childTnLst>
                                     <p:cmd type="call" cmd="playFrom(0.0)">
                                       <p:cBhvr>
-                                        <p:cTn id="6" dur="6451" fill="hold"/>
+                                        <p:cTn id="6" dur="6076" fill="hold"/>
                                         <p:tgtEl>
                                           <p:spTgt spid="6"/>
                                         </p:tgtEl>
@@ -5443,7 +5437,7 @@
           <p:cNvPr id="2" name="テキスト ボックス 1">
             <a:extLst>
               <a:ext uri="{FF2B5EF4-FFF2-40B4-BE49-F238E27FC236}">
-                <a16:creationId xmlns:a16="http://schemas.microsoft.com/office/drawing/2014/main" id="{A6F3A702-BAEE-6DA6-D758-653EA44366EB}"/>
+                <a16:creationId xmlns:a16="http://schemas.microsoft.com/office/drawing/2014/main" id="{E509D528-EAA0-33DE-8AE3-18ABC557F1F8}"/>
               </a:ext>
             </a:extLst>
           </p:cNvPr>
@@ -5489,7 +5483,7 @@
           <p:cNvPr id="3" name="テキスト ボックス 2">
             <a:extLst>
               <a:ext uri="{FF2B5EF4-FFF2-40B4-BE49-F238E27FC236}">
-                <a16:creationId xmlns:a16="http://schemas.microsoft.com/office/drawing/2014/main" id="{B67950C6-8807-11EE-01DC-BFEB528F0D30}"/>
+                <a16:creationId xmlns:a16="http://schemas.microsoft.com/office/drawing/2014/main" id="{ABF17BFC-CDDB-4CFA-4A80-E3B9371EB47D}"/>
               </a:ext>
             </a:extLst>
           </p:cNvPr>
@@ -5529,7 +5523,7 @@
           <p:cNvPr id="4" name="テキスト ボックス 3">
             <a:extLst>
               <a:ext uri="{FF2B5EF4-FFF2-40B4-BE49-F238E27FC236}">
-                <a16:creationId xmlns:a16="http://schemas.microsoft.com/office/drawing/2014/main" id="{8DB5DBF8-C981-50B8-17EF-AEF596240082}"/>
+                <a16:creationId xmlns:a16="http://schemas.microsoft.com/office/drawing/2014/main" id="{05F93EC7-D24C-A698-0595-A385D351DCD0}"/>
               </a:ext>
             </a:extLst>
           </p:cNvPr>
@@ -5594,7 +5588,7 @@
           <p:cNvPr id="5" name="テキスト ボックス 4">
             <a:extLst>
               <a:ext uri="{FF2B5EF4-FFF2-40B4-BE49-F238E27FC236}">
-                <a16:creationId xmlns:a16="http://schemas.microsoft.com/office/drawing/2014/main" id="{BC3881A6-9203-2403-178F-E7AEADB201D8}"/>
+                <a16:creationId xmlns:a16="http://schemas.microsoft.com/office/drawing/2014/main" id="{6882376A-6D7D-38C8-84E5-5134D5FFA117}"/>
               </a:ext>
             </a:extLst>
           </p:cNvPr>
@@ -5641,7 +5635,7 @@
             <a:hlinkClick r:id="" action="ppaction://media"/>
             <a:extLst>
               <a:ext uri="{FF2B5EF4-FFF2-40B4-BE49-F238E27FC236}">
-                <a16:creationId xmlns:a16="http://schemas.microsoft.com/office/drawing/2014/main" id="{AA73DF97-E548-C230-696F-9A1BA5597212}"/>
+                <a16:creationId xmlns:a16="http://schemas.microsoft.com/office/drawing/2014/main" id="{4D686601-14D6-9275-FFBE-3B43D92A0C75}"/>
               </a:ext>
             </a:extLst>
           </p:cNvPr>
@@ -5676,7 +5670,7 @@
     </p:spTree>
     <p:extLst>
       <p:ext uri="{BB962C8B-B14F-4D97-AF65-F5344CB8AC3E}">
-        <p14:creationId xmlns:p14="http://schemas.microsoft.com/office/powerpoint/2010/main" val="500135596"/>
+        <p14:creationId xmlns:p14="http://schemas.microsoft.com/office/powerpoint/2010/main" val="2748669521"/>
       </p:ext>
     </p:extLst>
   </p:cSld>
